--- a/kretz_ai_leadership_FULL_ready_to_deliver.pptx
+++ b/kretz_ai_leadership_FULL_ready_to_deliver.pptx
@@ -5250,6 +5250,10 @@
             <a:prstDash val="solid"/>
           </a:ln>
         </p:spPr>
+        <p:txBody>
+          <a:bodyPr/>
+          <a:p/>
+        </p:txBody>
       </p:sp>
       <p:sp>
         <p:nvSpPr>
@@ -5275,6 +5279,10 @@
             <a:prstDash val="solid"/>
           </a:ln>
         </p:spPr>
+        <p:txBody>
+          <a:bodyPr/>
+          <a:p/>
+        </p:txBody>
       </p:sp>
       <p:sp>
         <p:nvSpPr>
@@ -5300,6 +5308,10 @@
             <a:prstDash val="solid"/>
           </a:ln>
         </p:spPr>
+        <p:txBody>
+          <a:bodyPr/>
+          <a:p/>
+        </p:txBody>
       </p:sp>
       <p:sp>
         <p:nvSpPr>
@@ -5325,6 +5337,10 @@
             <a:prstDash val="solid"/>
           </a:ln>
         </p:spPr>
+        <p:txBody>
+          <a:bodyPr/>
+          <a:p/>
+        </p:txBody>
       </p:sp>
       <p:sp>
         <p:nvSpPr>
@@ -5572,6 +5588,10 @@
             <a:prstDash val="solid"/>
           </a:ln>
         </p:spPr>
+        <p:txBody>
+          <a:bodyPr/>
+          <a:p/>
+        </p:txBody>
       </p:sp>
       <p:sp>
         <p:nvSpPr>
@@ -5689,6 +5709,10 @@
             <a:prstDash val="solid"/>
           </a:ln>
         </p:spPr>
+        <p:txBody>
+          <a:bodyPr/>
+          <a:p/>
+        </p:txBody>
       </p:sp>
       <p:sp>
         <p:nvSpPr>
@@ -5806,6 +5830,10 @@
             <a:prstDash val="solid"/>
           </a:ln>
         </p:spPr>
+        <p:txBody>
+          <a:bodyPr/>
+          <a:p/>
+        </p:txBody>
       </p:sp>
       <p:sp>
         <p:nvSpPr>
@@ -5953,6 +5981,10 @@
             <a:prstDash val="solid"/>
           </a:ln>
         </p:spPr>
+        <p:txBody>
+          <a:bodyPr/>
+          <a:p/>
+        </p:txBody>
       </p:sp>
       <p:sp>
         <p:nvSpPr>
@@ -5978,6 +6010,10 @@
             <a:prstDash val="solid"/>
           </a:ln>
         </p:spPr>
+        <p:txBody>
+          <a:bodyPr/>
+          <a:p/>
+        </p:txBody>
       </p:sp>
       <p:sp>
         <p:nvSpPr>
@@ -6003,6 +6039,10 @@
             <a:prstDash val="solid"/>
           </a:ln>
         </p:spPr>
+        <p:txBody>
+          <a:bodyPr/>
+          <a:p/>
+        </p:txBody>
       </p:sp>
       <p:sp>
         <p:nvSpPr>
@@ -6028,6 +6068,10 @@
             <a:prstDash val="solid"/>
           </a:ln>
         </p:spPr>
+        <p:txBody>
+          <a:bodyPr/>
+          <a:p/>
+        </p:txBody>
       </p:sp>
       <p:sp>
         <p:nvSpPr>
@@ -6239,6 +6283,10 @@
             <a:prstDash val="solid"/>
           </a:ln>
         </p:spPr>
+        <p:txBody>
+          <a:bodyPr/>
+          <a:p/>
+        </p:txBody>
       </p:sp>
       <p:sp>
         <p:nvSpPr>
@@ -6342,6 +6390,10 @@
             <a:prstDash val="solid"/>
           </a:ln>
         </p:spPr>
+        <p:txBody>
+          <a:bodyPr/>
+          <a:p/>
+        </p:txBody>
       </p:sp>
       <p:sp>
         <p:nvSpPr>
@@ -6445,6 +6497,10 @@
             <a:prstDash val="solid"/>
           </a:ln>
         </p:spPr>
+        <p:txBody>
+          <a:bodyPr/>
+          <a:p/>
+        </p:txBody>
       </p:sp>
       <p:sp>
         <p:nvSpPr>
@@ -6578,6 +6634,10 @@
             <a:prstDash val="solid"/>
           </a:ln>
         </p:spPr>
+        <p:txBody>
+          <a:bodyPr/>
+          <a:p/>
+        </p:txBody>
       </p:sp>
       <p:sp>
         <p:nvSpPr>
@@ -6603,6 +6663,10 @@
             <a:prstDash val="solid"/>
           </a:ln>
         </p:spPr>
+        <p:txBody>
+          <a:bodyPr/>
+          <a:p/>
+        </p:txBody>
       </p:sp>
       <p:sp>
         <p:nvSpPr>
@@ -6628,6 +6692,10 @@
             <a:prstDash val="solid"/>
           </a:ln>
         </p:spPr>
+        <p:txBody>
+          <a:bodyPr/>
+          <a:p/>
+        </p:txBody>
       </p:sp>
       <p:sp>
         <p:nvSpPr>
@@ -6653,6 +6721,10 @@
             <a:prstDash val="solid"/>
           </a:ln>
         </p:spPr>
+        <p:txBody>
+          <a:bodyPr/>
+          <a:p/>
+        </p:txBody>
       </p:sp>
       <p:sp>
         <p:nvSpPr>
@@ -6864,6 +6936,10 @@
             <a:prstDash val="solid"/>
           </a:ln>
         </p:spPr>
+        <p:txBody>
+          <a:bodyPr/>
+          <a:p/>
+        </p:txBody>
       </p:sp>
       <p:sp>
         <p:nvSpPr>
@@ -6967,6 +7043,10 @@
             <a:prstDash val="solid"/>
           </a:ln>
         </p:spPr>
+        <p:txBody>
+          <a:bodyPr/>
+          <a:p/>
+        </p:txBody>
       </p:sp>
       <p:sp>
         <p:nvSpPr>
@@ -7070,6 +7150,10 @@
             <a:prstDash val="solid"/>
           </a:ln>
         </p:spPr>
+        <p:txBody>
+          <a:bodyPr/>
+          <a:p/>
+        </p:txBody>
       </p:sp>
       <p:sp>
         <p:nvSpPr>
@@ -7173,6 +7257,10 @@
             <a:prstDash val="solid"/>
           </a:ln>
         </p:spPr>
+        <p:txBody>
+          <a:bodyPr/>
+          <a:p/>
+        </p:txBody>
       </p:sp>
       <p:sp>
         <p:nvSpPr>
@@ -7276,6 +7364,10 @@
             <a:prstDash val="solid"/>
           </a:ln>
         </p:spPr>
+        <p:txBody>
+          <a:bodyPr/>
+          <a:p/>
+        </p:txBody>
       </p:sp>
       <p:sp>
         <p:nvSpPr>
@@ -7379,6 +7471,10 @@
             <a:prstDash val="solid"/>
           </a:ln>
         </p:spPr>
+        <p:txBody>
+          <a:bodyPr/>
+          <a:p/>
+        </p:txBody>
       </p:sp>
       <p:sp>
         <p:nvSpPr>
@@ -7512,6 +7608,10 @@
             <a:prstDash val="solid"/>
           </a:ln>
         </p:spPr>
+        <p:txBody>
+          <a:bodyPr/>
+          <a:p/>
+        </p:txBody>
       </p:sp>
       <p:sp>
         <p:nvSpPr>
@@ -7537,6 +7637,10 @@
             <a:prstDash val="solid"/>
           </a:ln>
         </p:spPr>
+        <p:txBody>
+          <a:bodyPr/>
+          <a:p/>
+        </p:txBody>
       </p:sp>
       <p:sp>
         <p:nvSpPr>
@@ -7562,6 +7666,10 @@
             <a:prstDash val="solid"/>
           </a:ln>
         </p:spPr>
+        <p:txBody>
+          <a:bodyPr/>
+          <a:p/>
+        </p:txBody>
       </p:sp>
       <p:sp>
         <p:nvSpPr>
@@ -7587,6 +7695,10 @@
             <a:prstDash val="solid"/>
           </a:ln>
         </p:spPr>
+        <p:txBody>
+          <a:bodyPr/>
+          <a:p/>
+        </p:txBody>
       </p:sp>
       <p:sp>
         <p:nvSpPr>
@@ -7720,6 +7832,10 @@
             <a:prstDash val="solid"/>
           </a:ln>
         </p:spPr>
+        <p:txBody>
+          <a:bodyPr/>
+          <a:p/>
+        </p:txBody>
       </p:sp>
       <p:sp>
         <p:nvSpPr>
@@ -7853,6 +7969,10 @@
             <a:prstDash val="solid"/>
           </a:ln>
         </p:spPr>
+        <p:txBody>
+          <a:bodyPr/>
+          <a:p/>
+        </p:txBody>
       </p:sp>
       <p:sp>
         <p:nvSpPr>
@@ -7878,6 +7998,10 @@
             <a:prstDash val="solid"/>
           </a:ln>
         </p:spPr>
+        <p:txBody>
+          <a:bodyPr/>
+          <a:p/>
+        </p:txBody>
       </p:sp>
       <p:sp>
         <p:nvSpPr>
@@ -7903,6 +8027,10 @@
             <a:prstDash val="solid"/>
           </a:ln>
         </p:spPr>
+        <p:txBody>
+          <a:bodyPr/>
+          <a:p/>
+        </p:txBody>
       </p:sp>
       <p:sp>
         <p:nvSpPr>
@@ -7928,6 +8056,10 @@
             <a:prstDash val="solid"/>
           </a:ln>
         </p:spPr>
+        <p:txBody>
+          <a:bodyPr/>
+          <a:p/>
+        </p:txBody>
       </p:sp>
       <p:sp>
         <p:nvSpPr>
@@ -8139,6 +8271,10 @@
             <a:prstDash val="solid"/>
           </a:ln>
         </p:spPr>
+        <p:txBody>
+          <a:bodyPr/>
+          <a:p/>
+        </p:txBody>
       </p:sp>
       <p:sp>
         <p:nvSpPr>
@@ -8242,6 +8378,10 @@
             <a:prstDash val="solid"/>
           </a:ln>
         </p:spPr>
+        <p:txBody>
+          <a:bodyPr/>
+          <a:p/>
+        </p:txBody>
       </p:sp>
       <p:sp>
         <p:nvSpPr>
@@ -8345,6 +8485,10 @@
             <a:prstDash val="solid"/>
           </a:ln>
         </p:spPr>
+        <p:txBody>
+          <a:bodyPr/>
+          <a:p/>
+        </p:txBody>
       </p:sp>
       <p:sp>
         <p:nvSpPr>
@@ -8567,6 +8711,10 @@
             <a:prstDash val="solid"/>
           </a:ln>
         </p:spPr>
+        <p:txBody>
+          <a:bodyPr/>
+          <a:p/>
+        </p:txBody>
       </p:sp>
       <p:sp>
         <p:nvSpPr>
@@ -8592,6 +8740,10 @@
             <a:prstDash val="solid"/>
           </a:ln>
         </p:spPr>
+        <p:txBody>
+          <a:bodyPr/>
+          <a:p/>
+        </p:txBody>
       </p:sp>
       <p:sp>
         <p:nvSpPr>
@@ -8617,6 +8769,10 @@
             <a:prstDash val="solid"/>
           </a:ln>
         </p:spPr>
+        <p:txBody>
+          <a:bodyPr/>
+          <a:p/>
+        </p:txBody>
       </p:sp>
       <p:sp>
         <p:nvSpPr>
@@ -8642,6 +8798,10 @@
             <a:prstDash val="solid"/>
           </a:ln>
         </p:spPr>
+        <p:txBody>
+          <a:bodyPr/>
+          <a:p/>
+        </p:txBody>
       </p:sp>
       <p:sp>
         <p:nvSpPr>
@@ -8853,6 +9013,10 @@
             <a:prstDash val="solid"/>
           </a:ln>
         </p:spPr>
+        <p:txBody>
+          <a:bodyPr/>
+          <a:p/>
+        </p:txBody>
       </p:sp>
       <p:sp>
         <p:nvSpPr>
@@ -8956,6 +9120,10 @@
             <a:prstDash val="solid"/>
           </a:ln>
         </p:spPr>
+        <p:txBody>
+          <a:bodyPr/>
+          <a:p/>
+        </p:txBody>
       </p:sp>
       <p:sp>
         <p:nvSpPr>
@@ -9059,6 +9227,10 @@
             <a:prstDash val="solid"/>
           </a:ln>
         </p:spPr>
+        <p:txBody>
+          <a:bodyPr/>
+          <a:p/>
+        </p:txBody>
       </p:sp>
       <p:sp>
         <p:nvSpPr>
@@ -9281,6 +9453,10 @@
             <a:prstDash val="solid"/>
           </a:ln>
         </p:spPr>
+        <p:txBody>
+          <a:bodyPr/>
+          <a:p/>
+        </p:txBody>
       </p:sp>
       <p:sp>
         <p:nvSpPr>
@@ -9306,6 +9482,10 @@
             <a:prstDash val="solid"/>
           </a:ln>
         </p:spPr>
+        <p:txBody>
+          <a:bodyPr/>
+          <a:p/>
+        </p:txBody>
       </p:sp>
       <p:sp>
         <p:nvSpPr>
@@ -9331,6 +9511,10 @@
             <a:prstDash val="solid"/>
           </a:ln>
         </p:spPr>
+        <p:txBody>
+          <a:bodyPr/>
+          <a:p/>
+        </p:txBody>
       </p:sp>
       <p:sp>
         <p:nvSpPr>
@@ -9356,6 +9540,10 @@
             <a:prstDash val="solid"/>
           </a:ln>
         </p:spPr>
+        <p:txBody>
+          <a:bodyPr/>
+          <a:p/>
+        </p:txBody>
       </p:sp>
       <p:sp>
         <p:nvSpPr>
@@ -9567,6 +9755,10 @@
             <a:prstDash val="solid"/>
           </a:ln>
         </p:spPr>
+        <p:txBody>
+          <a:bodyPr/>
+          <a:p/>
+        </p:txBody>
       </p:sp>
       <p:sp>
         <p:nvSpPr>
@@ -9670,6 +9862,10 @@
             <a:prstDash val="solid"/>
           </a:ln>
         </p:spPr>
+        <p:txBody>
+          <a:bodyPr/>
+          <a:p/>
+        </p:txBody>
       </p:sp>
       <p:sp>
         <p:nvSpPr>
@@ -9773,6 +9969,10 @@
             <a:prstDash val="solid"/>
           </a:ln>
         </p:spPr>
+        <p:txBody>
+          <a:bodyPr/>
+          <a:p/>
+        </p:txBody>
       </p:sp>
       <p:sp>
         <p:nvSpPr>
@@ -9995,6 +10195,10 @@
             <a:prstDash val="solid"/>
           </a:ln>
         </p:spPr>
+        <p:txBody>
+          <a:bodyPr/>
+          <a:p/>
+        </p:txBody>
       </p:sp>
       <p:sp>
         <p:nvSpPr>
@@ -10020,6 +10224,10 @@
             <a:prstDash val="solid"/>
           </a:ln>
         </p:spPr>
+        <p:txBody>
+          <a:bodyPr/>
+          <a:p/>
+        </p:txBody>
       </p:sp>
       <p:sp>
         <p:nvSpPr>
@@ -10045,6 +10253,10 @@
             <a:prstDash val="solid"/>
           </a:ln>
         </p:spPr>
+        <p:txBody>
+          <a:bodyPr/>
+          <a:p/>
+        </p:txBody>
       </p:sp>
       <p:sp>
         <p:nvSpPr>
@@ -10070,6 +10282,10 @@
             <a:prstDash val="solid"/>
           </a:ln>
         </p:spPr>
+        <p:txBody>
+          <a:bodyPr/>
+          <a:p/>
+        </p:txBody>
       </p:sp>
       <p:sp>
         <p:nvSpPr>
@@ -10281,6 +10497,10 @@
             <a:prstDash val="solid"/>
           </a:ln>
         </p:spPr>
+        <p:txBody>
+          <a:bodyPr/>
+          <a:p/>
+        </p:txBody>
       </p:sp>
       <p:sp>
         <p:nvSpPr>
@@ -10384,6 +10604,10 @@
             <a:prstDash val="solid"/>
           </a:ln>
         </p:spPr>
+        <p:txBody>
+          <a:bodyPr/>
+          <a:p/>
+        </p:txBody>
       </p:sp>
       <p:sp>
         <p:nvSpPr>
@@ -10487,6 +10711,10 @@
             <a:prstDash val="solid"/>
           </a:ln>
         </p:spPr>
+        <p:txBody>
+          <a:bodyPr/>
+          <a:p/>
+        </p:txBody>
       </p:sp>
       <p:sp>
         <p:nvSpPr>
@@ -10709,6 +10937,10 @@
             <a:prstDash val="solid"/>
           </a:ln>
         </p:spPr>
+        <p:txBody>
+          <a:bodyPr/>
+          <a:p/>
+        </p:txBody>
       </p:sp>
       <p:sp>
         <p:nvSpPr>
@@ -10734,6 +10966,10 @@
             <a:prstDash val="solid"/>
           </a:ln>
         </p:spPr>
+        <p:txBody>
+          <a:bodyPr/>
+          <a:p/>
+        </p:txBody>
       </p:sp>
       <p:sp>
         <p:nvSpPr>
@@ -10759,6 +10995,10 @@
             <a:prstDash val="solid"/>
           </a:ln>
         </p:spPr>
+        <p:txBody>
+          <a:bodyPr/>
+          <a:p/>
+        </p:txBody>
       </p:sp>
       <p:sp>
         <p:nvSpPr>
@@ -10784,6 +11024,10 @@
             <a:prstDash val="solid"/>
           </a:ln>
         </p:spPr>
+        <p:txBody>
+          <a:bodyPr/>
+          <a:p/>
+        </p:txBody>
       </p:sp>
       <p:sp>
         <p:nvSpPr>
@@ -10995,6 +11239,10 @@
             <a:prstDash val="solid"/>
           </a:ln>
         </p:spPr>
+        <p:txBody>
+          <a:bodyPr/>
+          <a:p/>
+        </p:txBody>
       </p:sp>
       <p:sp>
         <p:nvSpPr>
@@ -11098,6 +11346,10 @@
             <a:prstDash val="solid"/>
           </a:ln>
         </p:spPr>
+        <p:txBody>
+          <a:bodyPr/>
+          <a:p/>
+        </p:txBody>
       </p:sp>
       <p:sp>
         <p:nvSpPr>
@@ -11201,6 +11453,10 @@
             <a:prstDash val="solid"/>
           </a:ln>
         </p:spPr>
+        <p:txBody>
+          <a:bodyPr/>
+          <a:p/>
+        </p:txBody>
       </p:sp>
       <p:sp>
         <p:nvSpPr>
@@ -11423,6 +11679,10 @@
             <a:prstDash val="solid"/>
           </a:ln>
         </p:spPr>
+        <p:txBody>
+          <a:bodyPr/>
+          <a:p/>
+        </p:txBody>
       </p:sp>
       <p:sp>
         <p:nvSpPr>
@@ -11448,6 +11708,10 @@
             <a:prstDash val="solid"/>
           </a:ln>
         </p:spPr>
+        <p:txBody>
+          <a:bodyPr/>
+          <a:p/>
+        </p:txBody>
       </p:sp>
       <p:sp>
         <p:nvSpPr>
@@ -11473,6 +11737,10 @@
             <a:prstDash val="solid"/>
           </a:ln>
         </p:spPr>
+        <p:txBody>
+          <a:bodyPr/>
+          <a:p/>
+        </p:txBody>
       </p:sp>
       <p:sp>
         <p:nvSpPr>
@@ -11498,6 +11766,10 @@
             <a:prstDash val="solid"/>
           </a:ln>
         </p:spPr>
+        <p:txBody>
+          <a:bodyPr/>
+          <a:p/>
+        </p:txBody>
       </p:sp>
       <p:sp>
         <p:nvSpPr>
@@ -11709,6 +11981,10 @@
             <a:prstDash val="solid"/>
           </a:ln>
         </p:spPr>
+        <p:txBody>
+          <a:bodyPr/>
+          <a:p/>
+        </p:txBody>
       </p:sp>
       <p:sp>
         <p:nvSpPr>
@@ -11812,6 +12088,10 @@
             <a:prstDash val="solid"/>
           </a:ln>
         </p:spPr>
+        <p:txBody>
+          <a:bodyPr/>
+          <a:p/>
+        </p:txBody>
       </p:sp>
       <p:sp>
         <p:nvSpPr>
@@ -11915,6 +12195,10 @@
             <a:prstDash val="solid"/>
           </a:ln>
         </p:spPr>
+        <p:txBody>
+          <a:bodyPr/>
+          <a:p/>
+        </p:txBody>
       </p:sp>
       <p:sp>
         <p:nvSpPr>
@@ -12137,6 +12421,10 @@
             <a:prstDash val="solid"/>
           </a:ln>
         </p:spPr>
+        <p:txBody>
+          <a:bodyPr/>
+          <a:p/>
+        </p:txBody>
       </p:sp>
       <p:sp>
         <p:nvSpPr>
@@ -12162,6 +12450,10 @@
             <a:prstDash val="solid"/>
           </a:ln>
         </p:spPr>
+        <p:txBody>
+          <a:bodyPr/>
+          <a:p/>
+        </p:txBody>
       </p:sp>
       <p:sp>
         <p:nvSpPr>
@@ -12187,6 +12479,10 @@
             <a:prstDash val="solid"/>
           </a:ln>
         </p:spPr>
+        <p:txBody>
+          <a:bodyPr/>
+          <a:p/>
+        </p:txBody>
       </p:sp>
       <p:sp>
         <p:nvSpPr>
@@ -12212,6 +12508,10 @@
             <a:prstDash val="solid"/>
           </a:ln>
         </p:spPr>
+        <p:txBody>
+          <a:bodyPr/>
+          <a:p/>
+        </p:txBody>
       </p:sp>
       <p:sp>
         <p:nvSpPr>
@@ -12423,6 +12723,10 @@
             <a:prstDash val="solid"/>
           </a:ln>
         </p:spPr>
+        <p:txBody>
+          <a:bodyPr/>
+          <a:p/>
+        </p:txBody>
       </p:sp>
       <p:sp>
         <p:nvSpPr>
@@ -12526,6 +12830,10 @@
             <a:prstDash val="solid"/>
           </a:ln>
         </p:spPr>
+        <p:txBody>
+          <a:bodyPr/>
+          <a:p/>
+        </p:txBody>
       </p:sp>
       <p:sp>
         <p:nvSpPr>
@@ -12629,6 +12937,10 @@
             <a:prstDash val="solid"/>
           </a:ln>
         </p:spPr>
+        <p:txBody>
+          <a:bodyPr/>
+          <a:p/>
+        </p:txBody>
       </p:sp>
       <p:sp>
         <p:nvSpPr>
@@ -12851,6 +13163,10 @@
             <a:prstDash val="solid"/>
           </a:ln>
         </p:spPr>
+        <p:txBody>
+          <a:bodyPr/>
+          <a:p/>
+        </p:txBody>
       </p:sp>
       <p:sp>
         <p:nvSpPr>
@@ -12876,6 +13192,10 @@
             <a:prstDash val="solid"/>
           </a:ln>
         </p:spPr>
+        <p:txBody>
+          <a:bodyPr/>
+          <a:p/>
+        </p:txBody>
       </p:sp>
       <p:sp>
         <p:nvSpPr>
@@ -12901,6 +13221,10 @@
             <a:prstDash val="solid"/>
           </a:ln>
         </p:spPr>
+        <p:txBody>
+          <a:bodyPr/>
+          <a:p/>
+        </p:txBody>
       </p:sp>
       <p:sp>
         <p:nvSpPr>
@@ -12926,6 +13250,10 @@
             <a:prstDash val="solid"/>
           </a:ln>
         </p:spPr>
+        <p:txBody>
+          <a:bodyPr/>
+          <a:p/>
+        </p:txBody>
       </p:sp>
       <p:sp>
         <p:nvSpPr>
@@ -13097,6 +13425,10 @@
             <a:prstDash val="solid"/>
           </a:ln>
         </p:spPr>
+        <p:txBody>
+          <a:bodyPr/>
+          <a:p/>
+        </p:txBody>
       </p:sp>
       <p:sp>
         <p:nvSpPr>
@@ -13236,6 +13568,10 @@
             <a:prstDash val="solid"/>
           </a:ln>
         </p:spPr>
+        <p:txBody>
+          <a:bodyPr/>
+          <a:p/>
+        </p:txBody>
       </p:sp>
       <p:sp>
         <p:nvSpPr>
@@ -13375,6 +13711,10 @@
             <a:prstDash val="solid"/>
           </a:ln>
         </p:spPr>
+        <p:txBody>
+          <a:bodyPr/>
+          <a:p/>
+        </p:txBody>
       </p:sp>
       <p:sp>
         <p:nvSpPr>
@@ -13514,6 +13854,10 @@
             <a:prstDash val="solid"/>
           </a:ln>
         </p:spPr>
+        <p:txBody>
+          <a:bodyPr/>
+          <a:p/>
+        </p:txBody>
       </p:sp>
       <p:sp>
         <p:nvSpPr>
@@ -13653,6 +13997,10 @@
             <a:prstDash val="solid"/>
           </a:ln>
         </p:spPr>
+        <p:txBody>
+          <a:bodyPr/>
+          <a:p/>
+        </p:txBody>
       </p:sp>
       <p:sp>
         <p:nvSpPr>
@@ -13792,6 +14140,10 @@
             <a:prstDash val="solid"/>
           </a:ln>
         </p:spPr>
+        <p:txBody>
+          <a:bodyPr/>
+          <a:p/>
+        </p:txBody>
       </p:sp>
       <p:sp>
         <p:nvSpPr>
@@ -13931,6 +14283,10 @@
             <a:prstDash val="solid"/>
           </a:ln>
         </p:spPr>
+        <p:txBody>
+          <a:bodyPr/>
+          <a:p/>
+        </p:txBody>
       </p:sp>
       <p:sp>
         <p:nvSpPr>
@@ -14070,6 +14426,10 @@
             <a:prstDash val="solid"/>
           </a:ln>
         </p:spPr>
+        <p:txBody>
+          <a:bodyPr/>
+          <a:p/>
+        </p:txBody>
       </p:sp>
       <p:sp>
         <p:nvSpPr>
@@ -14239,6 +14599,10 @@
             <a:prstDash val="solid"/>
           </a:ln>
         </p:spPr>
+        <p:txBody>
+          <a:bodyPr/>
+          <a:p/>
+        </p:txBody>
       </p:sp>
       <p:sp>
         <p:nvSpPr>
@@ -14264,6 +14628,10 @@
             <a:prstDash val="solid"/>
           </a:ln>
         </p:spPr>
+        <p:txBody>
+          <a:bodyPr/>
+          <a:p/>
+        </p:txBody>
       </p:sp>
       <p:sp>
         <p:nvSpPr>
@@ -14289,6 +14657,10 @@
             <a:prstDash val="solid"/>
           </a:ln>
         </p:spPr>
+        <p:txBody>
+          <a:bodyPr/>
+          <a:p/>
+        </p:txBody>
       </p:sp>
       <p:sp>
         <p:nvSpPr>
@@ -14314,6 +14686,10 @@
             <a:prstDash val="solid"/>
           </a:ln>
         </p:spPr>
+        <p:txBody>
+          <a:bodyPr/>
+          <a:p/>
+        </p:txBody>
       </p:sp>
       <p:sp>
         <p:nvSpPr>
@@ -14525,6 +14901,10 @@
             <a:prstDash val="solid"/>
           </a:ln>
         </p:spPr>
+        <p:txBody>
+          <a:bodyPr/>
+          <a:p/>
+        </p:txBody>
       </p:sp>
       <p:sp>
         <p:nvSpPr>
@@ -14628,6 +15008,10 @@
             <a:prstDash val="solid"/>
           </a:ln>
         </p:spPr>
+        <p:txBody>
+          <a:bodyPr/>
+          <a:p/>
+        </p:txBody>
       </p:sp>
       <p:sp>
         <p:nvSpPr>
@@ -14731,6 +15115,10 @@
             <a:prstDash val="solid"/>
           </a:ln>
         </p:spPr>
+        <p:txBody>
+          <a:bodyPr/>
+          <a:p/>
+        </p:txBody>
       </p:sp>
       <p:sp>
         <p:nvSpPr>
@@ -14953,6 +15341,10 @@
             <a:prstDash val="solid"/>
           </a:ln>
         </p:spPr>
+        <p:txBody>
+          <a:bodyPr/>
+          <a:p/>
+        </p:txBody>
       </p:sp>
       <p:sp>
         <p:nvSpPr>
@@ -14978,6 +15370,10 @@
             <a:prstDash val="solid"/>
           </a:ln>
         </p:spPr>
+        <p:txBody>
+          <a:bodyPr/>
+          <a:p/>
+        </p:txBody>
       </p:sp>
       <p:sp>
         <p:nvSpPr>
@@ -15003,6 +15399,10 @@
             <a:prstDash val="solid"/>
           </a:ln>
         </p:spPr>
+        <p:txBody>
+          <a:bodyPr/>
+          <a:p/>
+        </p:txBody>
       </p:sp>
       <p:sp>
         <p:nvSpPr>
@@ -15028,6 +15428,10 @@
             <a:prstDash val="solid"/>
           </a:ln>
         </p:spPr>
+        <p:txBody>
+          <a:bodyPr/>
+          <a:p/>
+        </p:txBody>
       </p:sp>
       <p:sp>
         <p:nvSpPr>
@@ -15239,6 +15643,10 @@
             <a:prstDash val="solid"/>
           </a:ln>
         </p:spPr>
+        <p:txBody>
+          <a:bodyPr/>
+          <a:p/>
+        </p:txBody>
       </p:sp>
       <p:sp>
         <p:nvSpPr>
@@ -15342,6 +15750,10 @@
             <a:prstDash val="solid"/>
           </a:ln>
         </p:spPr>
+        <p:txBody>
+          <a:bodyPr/>
+          <a:p/>
+        </p:txBody>
       </p:sp>
       <p:sp>
         <p:nvSpPr>
@@ -15445,6 +15857,10 @@
             <a:prstDash val="solid"/>
           </a:ln>
         </p:spPr>
+        <p:txBody>
+          <a:bodyPr/>
+          <a:p/>
+        </p:txBody>
       </p:sp>
       <p:sp>
         <p:nvSpPr>
@@ -15548,6 +15964,10 @@
             <a:prstDash val="solid"/>
           </a:ln>
         </p:spPr>
+        <p:txBody>
+          <a:bodyPr/>
+          <a:p/>
+        </p:txBody>
       </p:sp>
       <p:sp>
         <p:nvSpPr>
@@ -15681,6 +16101,10 @@
             <a:prstDash val="solid"/>
           </a:ln>
         </p:spPr>
+        <p:txBody>
+          <a:bodyPr/>
+          <a:p/>
+        </p:txBody>
       </p:sp>
       <p:sp>
         <p:nvSpPr>
@@ -15706,6 +16130,10 @@
             <a:prstDash val="solid"/>
           </a:ln>
         </p:spPr>
+        <p:txBody>
+          <a:bodyPr/>
+          <a:p/>
+        </p:txBody>
       </p:sp>
       <p:sp>
         <p:nvSpPr>
@@ -15731,6 +16159,10 @@
             <a:prstDash val="solid"/>
           </a:ln>
         </p:spPr>
+        <p:txBody>
+          <a:bodyPr/>
+          <a:p/>
+        </p:txBody>
       </p:sp>
       <p:sp>
         <p:nvSpPr>
@@ -15756,6 +16188,10 @@
             <a:prstDash val="solid"/>
           </a:ln>
         </p:spPr>
+        <p:txBody>
+          <a:bodyPr/>
+          <a:p/>
+        </p:txBody>
       </p:sp>
       <p:sp>
         <p:nvSpPr>
@@ -15889,6 +16325,10 @@
             <a:prstDash val="solid"/>
           </a:ln>
         </p:spPr>
+        <p:txBody>
+          <a:bodyPr/>
+          <a:p/>
+        </p:txBody>
       </p:sp>
       <p:sp>
         <p:nvSpPr>
@@ -16022,6 +16462,10 @@
             <a:prstDash val="solid"/>
           </a:ln>
         </p:spPr>
+        <p:txBody>
+          <a:bodyPr/>
+          <a:p/>
+        </p:txBody>
       </p:sp>
       <p:sp>
         <p:nvSpPr>
@@ -16047,6 +16491,10 @@
             <a:prstDash val="solid"/>
           </a:ln>
         </p:spPr>
+        <p:txBody>
+          <a:bodyPr/>
+          <a:p/>
+        </p:txBody>
       </p:sp>
       <p:sp>
         <p:nvSpPr>
@@ -16072,6 +16520,10 @@
             <a:prstDash val="solid"/>
           </a:ln>
         </p:spPr>
+        <p:txBody>
+          <a:bodyPr/>
+          <a:p/>
+        </p:txBody>
       </p:sp>
       <p:sp>
         <p:nvSpPr>
@@ -16097,6 +16549,10 @@
             <a:prstDash val="solid"/>
           </a:ln>
         </p:spPr>
+        <p:txBody>
+          <a:bodyPr/>
+          <a:p/>
+        </p:txBody>
       </p:sp>
       <p:sp>
         <p:nvSpPr>
@@ -16308,6 +16764,10 @@
             <a:prstDash val="solid"/>
           </a:ln>
         </p:spPr>
+        <p:txBody>
+          <a:bodyPr/>
+          <a:p/>
+        </p:txBody>
       </p:sp>
       <p:sp>
         <p:nvSpPr>
@@ -16411,6 +16871,10 @@
             <a:prstDash val="solid"/>
           </a:ln>
         </p:spPr>
+        <p:txBody>
+          <a:bodyPr/>
+          <a:p/>
+        </p:txBody>
       </p:sp>
       <p:sp>
         <p:nvSpPr>
@@ -16514,6 +16978,10 @@
             <a:prstDash val="solid"/>
           </a:ln>
         </p:spPr>
+        <p:txBody>
+          <a:bodyPr/>
+          <a:p/>
+        </p:txBody>
       </p:sp>
       <p:sp>
         <p:nvSpPr>
@@ -16617,6 +17085,10 @@
             <a:prstDash val="solid"/>
           </a:ln>
         </p:spPr>
+        <p:txBody>
+          <a:bodyPr/>
+          <a:p/>
+        </p:txBody>
       </p:sp>
       <p:sp>
         <p:nvSpPr>
@@ -16720,6 +17192,10 @@
             <a:prstDash val="solid"/>
           </a:ln>
         </p:spPr>
+        <p:txBody>
+          <a:bodyPr/>
+          <a:p/>
+        </p:txBody>
       </p:sp>
       <p:sp>
         <p:nvSpPr>
@@ -16853,6 +17329,10 @@
             <a:prstDash val="solid"/>
           </a:ln>
         </p:spPr>
+        <p:txBody>
+          <a:bodyPr/>
+          <a:p/>
+        </p:txBody>
       </p:sp>
       <p:sp>
         <p:nvSpPr>
@@ -16878,6 +17358,10 @@
             <a:prstDash val="solid"/>
           </a:ln>
         </p:spPr>
+        <p:txBody>
+          <a:bodyPr/>
+          <a:p/>
+        </p:txBody>
       </p:sp>
       <p:sp>
         <p:nvSpPr>
@@ -16903,6 +17387,10 @@
             <a:prstDash val="solid"/>
           </a:ln>
         </p:spPr>
+        <p:txBody>
+          <a:bodyPr/>
+          <a:p/>
+        </p:txBody>
       </p:sp>
       <p:sp>
         <p:nvSpPr>
@@ -16928,6 +17416,10 @@
             <a:prstDash val="solid"/>
           </a:ln>
         </p:spPr>
+        <p:txBody>
+          <a:bodyPr/>
+          <a:p/>
+        </p:txBody>
       </p:sp>
       <p:sp>
         <p:nvSpPr>
@@ -17139,6 +17631,10 @@
             <a:prstDash val="solid"/>
           </a:ln>
         </p:spPr>
+        <p:txBody>
+          <a:bodyPr/>
+          <a:p/>
+        </p:txBody>
       </p:sp>
       <p:sp>
         <p:nvSpPr>
@@ -17242,6 +17738,10 @@
             <a:prstDash val="solid"/>
           </a:ln>
         </p:spPr>
+        <p:txBody>
+          <a:bodyPr/>
+          <a:p/>
+        </p:txBody>
       </p:sp>
       <p:sp>
         <p:nvSpPr>
@@ -17345,6 +17845,10 @@
             <a:prstDash val="solid"/>
           </a:ln>
         </p:spPr>
+        <p:txBody>
+          <a:bodyPr/>
+          <a:p/>
+        </p:txBody>
       </p:sp>
       <p:sp>
         <p:nvSpPr>
@@ -17567,6 +18071,10 @@
             <a:prstDash val="solid"/>
           </a:ln>
         </p:spPr>
+        <p:txBody>
+          <a:bodyPr/>
+          <a:p/>
+        </p:txBody>
       </p:sp>
       <p:sp>
         <p:nvSpPr>
@@ -17592,6 +18100,10 @@
             <a:prstDash val="solid"/>
           </a:ln>
         </p:spPr>
+        <p:txBody>
+          <a:bodyPr/>
+          <a:p/>
+        </p:txBody>
       </p:sp>
       <p:sp>
         <p:nvSpPr>
@@ -17617,6 +18129,10 @@
             <a:prstDash val="solid"/>
           </a:ln>
         </p:spPr>
+        <p:txBody>
+          <a:bodyPr/>
+          <a:p/>
+        </p:txBody>
       </p:sp>
       <p:sp>
         <p:nvSpPr>
@@ -17642,6 +18158,10 @@
             <a:prstDash val="solid"/>
           </a:ln>
         </p:spPr>
+        <p:txBody>
+          <a:bodyPr/>
+          <a:p/>
+        </p:txBody>
       </p:sp>
       <p:sp>
         <p:nvSpPr>
@@ -17853,6 +18373,10 @@
             <a:prstDash val="solid"/>
           </a:ln>
         </p:spPr>
+        <p:txBody>
+          <a:bodyPr/>
+          <a:p/>
+        </p:txBody>
       </p:sp>
       <p:sp>
         <p:nvSpPr>
@@ -17956,6 +18480,10 @@
             <a:prstDash val="solid"/>
           </a:ln>
         </p:spPr>
+        <p:txBody>
+          <a:bodyPr/>
+          <a:p/>
+        </p:txBody>
       </p:sp>
       <p:sp>
         <p:nvSpPr>
@@ -18059,6 +18587,10 @@
             <a:prstDash val="solid"/>
           </a:ln>
         </p:spPr>
+        <p:txBody>
+          <a:bodyPr/>
+          <a:p/>
+        </p:txBody>
       </p:sp>
       <p:sp>
         <p:nvSpPr>
@@ -18281,6 +18813,10 @@
             <a:prstDash val="solid"/>
           </a:ln>
         </p:spPr>
+        <p:txBody>
+          <a:bodyPr/>
+          <a:p/>
+        </p:txBody>
       </p:sp>
       <p:sp>
         <p:nvSpPr>
@@ -18306,6 +18842,10 @@
             <a:prstDash val="solid"/>
           </a:ln>
         </p:spPr>
+        <p:txBody>
+          <a:bodyPr/>
+          <a:p/>
+        </p:txBody>
       </p:sp>
       <p:sp>
         <p:nvSpPr>
@@ -18331,6 +18871,10 @@
             <a:prstDash val="solid"/>
           </a:ln>
         </p:spPr>
+        <p:txBody>
+          <a:bodyPr/>
+          <a:p/>
+        </p:txBody>
       </p:sp>
       <p:sp>
         <p:nvSpPr>
@@ -18356,6 +18900,10 @@
             <a:prstDash val="solid"/>
           </a:ln>
         </p:spPr>
+        <p:txBody>
+          <a:bodyPr/>
+          <a:p/>
+        </p:txBody>
       </p:sp>
       <p:sp>
         <p:nvSpPr>
@@ -18567,6 +19115,10 @@
             <a:prstDash val="solid"/>
           </a:ln>
         </p:spPr>
+        <p:txBody>
+          <a:bodyPr/>
+          <a:p/>
+        </p:txBody>
       </p:sp>
       <p:sp>
         <p:nvSpPr>
@@ -18670,6 +19222,10 @@
             <a:prstDash val="solid"/>
           </a:ln>
         </p:spPr>
+        <p:txBody>
+          <a:bodyPr/>
+          <a:p/>
+        </p:txBody>
       </p:sp>
       <p:sp>
         <p:nvSpPr>
@@ -18773,6 +19329,10 @@
             <a:prstDash val="solid"/>
           </a:ln>
         </p:spPr>
+        <p:txBody>
+          <a:bodyPr/>
+          <a:p/>
+        </p:txBody>
       </p:sp>
       <p:sp>
         <p:nvSpPr>
@@ -18995,6 +19555,10 @@
             <a:prstDash val="solid"/>
           </a:ln>
         </p:spPr>
+        <p:txBody>
+          <a:bodyPr/>
+          <a:p/>
+        </p:txBody>
       </p:sp>
       <p:sp>
         <p:nvSpPr>
@@ -19020,6 +19584,10 @@
             <a:prstDash val="solid"/>
           </a:ln>
         </p:spPr>
+        <p:txBody>
+          <a:bodyPr/>
+          <a:p/>
+        </p:txBody>
       </p:sp>
       <p:sp>
         <p:nvSpPr>
@@ -19045,6 +19613,10 @@
             <a:prstDash val="solid"/>
           </a:ln>
         </p:spPr>
+        <p:txBody>
+          <a:bodyPr/>
+          <a:p/>
+        </p:txBody>
       </p:sp>
       <p:sp>
         <p:nvSpPr>
@@ -19070,6 +19642,10 @@
             <a:prstDash val="solid"/>
           </a:ln>
         </p:spPr>
+        <p:txBody>
+          <a:bodyPr/>
+          <a:p/>
+        </p:txBody>
       </p:sp>
       <p:sp>
         <p:nvSpPr>
@@ -19281,6 +19857,10 @@
             <a:prstDash val="solid"/>
           </a:ln>
         </p:spPr>
+        <p:txBody>
+          <a:bodyPr/>
+          <a:p/>
+        </p:txBody>
       </p:sp>
       <p:sp>
         <p:nvSpPr>
@@ -19384,6 +19964,10 @@
             <a:prstDash val="solid"/>
           </a:ln>
         </p:spPr>
+        <p:txBody>
+          <a:bodyPr/>
+          <a:p/>
+        </p:txBody>
       </p:sp>
       <p:sp>
         <p:nvSpPr>
@@ -19487,6 +20071,10 @@
             <a:prstDash val="solid"/>
           </a:ln>
         </p:spPr>
+        <p:txBody>
+          <a:bodyPr/>
+          <a:p/>
+        </p:txBody>
       </p:sp>
       <p:sp>
         <p:nvSpPr>
@@ -19709,6 +20297,10 @@
             <a:prstDash val="solid"/>
           </a:ln>
         </p:spPr>
+        <p:txBody>
+          <a:bodyPr/>
+          <a:p/>
+        </p:txBody>
       </p:sp>
       <p:sp>
         <p:nvSpPr>
@@ -19734,6 +20326,10 @@
             <a:prstDash val="solid"/>
           </a:ln>
         </p:spPr>
+        <p:txBody>
+          <a:bodyPr/>
+          <a:p/>
+        </p:txBody>
       </p:sp>
       <p:sp>
         <p:nvSpPr>
@@ -19759,6 +20355,10 @@
             <a:prstDash val="solid"/>
           </a:ln>
         </p:spPr>
+        <p:txBody>
+          <a:bodyPr/>
+          <a:p/>
+        </p:txBody>
       </p:sp>
       <p:sp>
         <p:nvSpPr>
@@ -19784,6 +20384,10 @@
             <a:prstDash val="solid"/>
           </a:ln>
         </p:spPr>
+        <p:txBody>
+          <a:bodyPr/>
+          <a:p/>
+        </p:txBody>
       </p:sp>
       <p:sp>
         <p:nvSpPr>
@@ -19917,6 +20521,10 @@
             <a:prstDash val="solid"/>
           </a:ln>
         </p:spPr>
+        <p:txBody>
+          <a:bodyPr/>
+          <a:p/>
+        </p:txBody>
       </p:sp>
       <p:sp>
         <p:nvSpPr>
@@ -20050,6 +20658,10 @@
             <a:prstDash val="solid"/>
           </a:ln>
         </p:spPr>
+        <p:txBody>
+          <a:bodyPr/>
+          <a:p/>
+        </p:txBody>
       </p:sp>
       <p:sp>
         <p:nvSpPr>
@@ -20075,6 +20687,10 @@
             <a:prstDash val="solid"/>
           </a:ln>
         </p:spPr>
+        <p:txBody>
+          <a:bodyPr/>
+          <a:p/>
+        </p:txBody>
       </p:sp>
       <p:sp>
         <p:nvSpPr>
@@ -20100,6 +20716,10 @@
             <a:prstDash val="solid"/>
           </a:ln>
         </p:spPr>
+        <p:txBody>
+          <a:bodyPr/>
+          <a:p/>
+        </p:txBody>
       </p:sp>
       <p:sp>
         <p:nvSpPr>
@@ -20125,6 +20745,10 @@
             <a:prstDash val="solid"/>
           </a:ln>
         </p:spPr>
+        <p:txBody>
+          <a:bodyPr/>
+          <a:p/>
+        </p:txBody>
       </p:sp>
       <p:sp>
         <p:nvSpPr>
@@ -20336,6 +20960,10 @@
             <a:prstDash val="solid"/>
           </a:ln>
         </p:spPr>
+        <p:txBody>
+          <a:bodyPr/>
+          <a:p/>
+        </p:txBody>
       </p:sp>
       <p:sp>
         <p:nvSpPr>
@@ -20439,6 +21067,10 @@
             <a:prstDash val="solid"/>
           </a:ln>
         </p:spPr>
+        <p:txBody>
+          <a:bodyPr/>
+          <a:p/>
+        </p:txBody>
       </p:sp>
       <p:sp>
         <p:nvSpPr>
@@ -20542,6 +21174,10 @@
             <a:prstDash val="solid"/>
           </a:ln>
         </p:spPr>
+        <p:txBody>
+          <a:bodyPr/>
+          <a:p/>
+        </p:txBody>
       </p:sp>
       <p:sp>
         <p:nvSpPr>
@@ -20645,6 +21281,10 @@
             <a:prstDash val="solid"/>
           </a:ln>
         </p:spPr>
+        <p:txBody>
+          <a:bodyPr/>
+          <a:p/>
+        </p:txBody>
       </p:sp>
       <p:sp>
         <p:nvSpPr>
@@ -20748,6 +21388,10 @@
             <a:prstDash val="solid"/>
           </a:ln>
         </p:spPr>
+        <p:txBody>
+          <a:bodyPr/>
+          <a:p/>
+        </p:txBody>
       </p:sp>
       <p:sp>
         <p:nvSpPr>
@@ -20851,6 +21495,10 @@
             <a:prstDash val="solid"/>
           </a:ln>
         </p:spPr>
+        <p:txBody>
+          <a:bodyPr/>
+          <a:p/>
+        </p:txBody>
       </p:sp>
       <p:sp>
         <p:nvSpPr>
@@ -20984,6 +21632,10 @@
             <a:prstDash val="solid"/>
           </a:ln>
         </p:spPr>
+        <p:txBody>
+          <a:bodyPr/>
+          <a:p/>
+        </p:txBody>
       </p:sp>
       <p:sp>
         <p:nvSpPr>
@@ -21009,6 +21661,10 @@
             <a:prstDash val="solid"/>
           </a:ln>
         </p:spPr>
+        <p:txBody>
+          <a:bodyPr/>
+          <a:p/>
+        </p:txBody>
       </p:sp>
       <p:sp>
         <p:nvSpPr>
@@ -21034,6 +21690,10 @@
             <a:prstDash val="solid"/>
           </a:ln>
         </p:spPr>
+        <p:txBody>
+          <a:bodyPr/>
+          <a:p/>
+        </p:txBody>
       </p:sp>
       <p:sp>
         <p:nvSpPr>
@@ -21059,6 +21719,10 @@
             <a:prstDash val="solid"/>
           </a:ln>
         </p:spPr>
+        <p:txBody>
+          <a:bodyPr/>
+          <a:p/>
+        </p:txBody>
       </p:sp>
       <p:sp>
         <p:nvSpPr>
@@ -21270,6 +21934,10 @@
             <a:prstDash val="solid"/>
           </a:ln>
         </p:spPr>
+        <p:txBody>
+          <a:bodyPr/>
+          <a:p/>
+        </p:txBody>
       </p:sp>
       <p:sp>
         <p:nvSpPr>
@@ -21409,6 +22077,10 @@
             <a:prstDash val="solid"/>
           </a:ln>
         </p:spPr>
+        <p:txBody>
+          <a:bodyPr/>
+          <a:p/>
+        </p:txBody>
       </p:sp>
       <p:sp>
         <p:nvSpPr>
@@ -21548,6 +22220,10 @@
             <a:prstDash val="solid"/>
           </a:ln>
         </p:spPr>
+        <p:txBody>
+          <a:bodyPr/>
+          <a:p/>
+        </p:txBody>
       </p:sp>
       <p:sp>
         <p:nvSpPr>
@@ -21717,6 +22393,10 @@
             <a:prstDash val="solid"/>
           </a:ln>
         </p:spPr>
+        <p:txBody>
+          <a:bodyPr/>
+          <a:p/>
+        </p:txBody>
       </p:sp>
       <p:sp>
         <p:nvSpPr>
@@ -21742,6 +22422,10 @@
             <a:prstDash val="solid"/>
           </a:ln>
         </p:spPr>
+        <p:txBody>
+          <a:bodyPr/>
+          <a:p/>
+        </p:txBody>
       </p:sp>
       <p:sp>
         <p:nvSpPr>
@@ -21767,6 +22451,10 @@
             <a:prstDash val="solid"/>
           </a:ln>
         </p:spPr>
+        <p:txBody>
+          <a:bodyPr/>
+          <a:p/>
+        </p:txBody>
       </p:sp>
       <p:sp>
         <p:nvSpPr>
@@ -21792,6 +22480,10 @@
             <a:prstDash val="solid"/>
           </a:ln>
         </p:spPr>
+        <p:txBody>
+          <a:bodyPr/>
+          <a:p/>
+        </p:txBody>
       </p:sp>
       <p:sp>
         <p:nvSpPr>
@@ -22001,6 +22693,10 @@
             <a:prstDash val="solid"/>
           </a:ln>
         </p:spPr>
+        <p:txBody>
+          <a:bodyPr/>
+          <a:p/>
+        </p:txBody>
       </p:sp>
       <p:sp>
         <p:nvSpPr>
@@ -22104,6 +22800,10 @@
             <a:prstDash val="solid"/>
           </a:ln>
         </p:spPr>
+        <p:txBody>
+          <a:bodyPr/>
+          <a:p/>
+        </p:txBody>
       </p:sp>
       <p:sp>
         <p:nvSpPr>
@@ -22207,6 +22907,10 @@
             <a:prstDash val="solid"/>
           </a:ln>
         </p:spPr>
+        <p:txBody>
+          <a:bodyPr/>
+          <a:p/>
+        </p:txBody>
       </p:sp>
       <p:sp>
         <p:nvSpPr>
@@ -22391,6 +23095,10 @@
             <a:prstDash val="solid"/>
           </a:ln>
         </p:spPr>
+        <p:txBody>
+          <a:bodyPr/>
+          <a:p/>
+        </p:txBody>
       </p:sp>
       <p:sp>
         <p:nvSpPr>
@@ -22416,6 +23124,10 @@
             <a:prstDash val="solid"/>
           </a:ln>
         </p:spPr>
+        <p:txBody>
+          <a:bodyPr/>
+          <a:p/>
+        </p:txBody>
       </p:sp>
       <p:sp>
         <p:nvSpPr>
@@ -22441,6 +23153,10 @@
             <a:prstDash val="solid"/>
           </a:ln>
         </p:spPr>
+        <p:txBody>
+          <a:bodyPr/>
+          <a:p/>
+        </p:txBody>
       </p:sp>
       <p:sp>
         <p:nvSpPr>
@@ -22466,6 +23182,10 @@
             <a:prstDash val="solid"/>
           </a:ln>
         </p:spPr>
+        <p:txBody>
+          <a:bodyPr/>
+          <a:p/>
+        </p:txBody>
       </p:sp>
       <p:sp>
         <p:nvSpPr>
@@ -22677,6 +23397,10 @@
             <a:prstDash val="solid"/>
           </a:ln>
         </p:spPr>
+        <p:txBody>
+          <a:bodyPr/>
+          <a:p/>
+        </p:txBody>
       </p:sp>
       <p:sp>
         <p:nvSpPr>
@@ -22780,6 +23504,10 @@
             <a:prstDash val="solid"/>
           </a:ln>
         </p:spPr>
+        <p:txBody>
+          <a:bodyPr/>
+          <a:p/>
+        </p:txBody>
       </p:sp>
       <p:sp>
         <p:nvSpPr>
@@ -22883,6 +23611,10 @@
             <a:prstDash val="solid"/>
           </a:ln>
         </p:spPr>
+        <p:txBody>
+          <a:bodyPr/>
+          <a:p/>
+        </p:txBody>
       </p:sp>
       <p:sp>
         <p:nvSpPr>
@@ -22986,6 +23718,10 @@
             <a:prstDash val="solid"/>
           </a:ln>
         </p:spPr>
+        <p:txBody>
+          <a:bodyPr/>
+          <a:p/>
+        </p:txBody>
       </p:sp>
       <p:sp>
         <p:nvSpPr>
@@ -23089,6 +23825,10 @@
             <a:prstDash val="solid"/>
           </a:ln>
         </p:spPr>
+        <p:txBody>
+          <a:bodyPr/>
+          <a:p/>
+        </p:txBody>
       </p:sp>
       <p:sp>
         <p:nvSpPr>
@@ -23192,6 +23932,10 @@
             <a:prstDash val="solid"/>
           </a:ln>
         </p:spPr>
+        <p:txBody>
+          <a:bodyPr/>
+          <a:p/>
+        </p:txBody>
       </p:sp>
       <p:sp>
         <p:nvSpPr>
@@ -23325,6 +24069,10 @@
             <a:prstDash val="solid"/>
           </a:ln>
         </p:spPr>
+        <p:txBody>
+          <a:bodyPr/>
+          <a:p/>
+        </p:txBody>
       </p:sp>
       <p:sp>
         <p:nvSpPr>
@@ -23350,6 +24098,10 @@
             <a:prstDash val="solid"/>
           </a:ln>
         </p:spPr>
+        <p:txBody>
+          <a:bodyPr/>
+          <a:p/>
+        </p:txBody>
       </p:sp>
       <p:sp>
         <p:nvSpPr>
@@ -23375,6 +24127,10 @@
             <a:prstDash val="solid"/>
           </a:ln>
         </p:spPr>
+        <p:txBody>
+          <a:bodyPr/>
+          <a:p/>
+        </p:txBody>
       </p:sp>
       <p:sp>
         <p:nvSpPr>
@@ -23400,6 +24156,10 @@
             <a:prstDash val="solid"/>
           </a:ln>
         </p:spPr>
+        <p:txBody>
+          <a:bodyPr/>
+          <a:p/>
+        </p:txBody>
       </p:sp>
       <p:sp>
         <p:nvSpPr>
@@ -23573,6 +24333,10 @@
             <a:prstDash val="solid"/>
           </a:ln>
         </p:spPr>
+        <p:txBody>
+          <a:bodyPr/>
+          <a:p/>
+        </p:txBody>
       </p:sp>
       <p:sp>
         <p:nvSpPr>
@@ -23676,6 +24440,10 @@
             <a:prstDash val="solid"/>
           </a:ln>
         </p:spPr>
+        <p:txBody>
+          <a:bodyPr/>
+          <a:p/>
+        </p:txBody>
       </p:sp>
       <p:sp>
         <p:nvSpPr>
@@ -23779,6 +24547,10 @@
             <a:prstDash val="solid"/>
           </a:ln>
         </p:spPr>
+        <p:txBody>
+          <a:bodyPr/>
+          <a:p/>
+        </p:txBody>
       </p:sp>
       <p:sp>
         <p:nvSpPr>
@@ -23910,7 +24682,7 @@
       <p:sp>
         <p:nvSpPr>
           <p:cNvPr id="20" name="Text 18">
-            <a:hlinkClick r:id="rId2" tooltip=""/>
+            <a:hlinkClick r:id="rId5"/>
           </p:cNvPr>
           <p:cNvSpPr/>
           <p:nvPr/>
@@ -23944,13 +24716,7 @@
                 <a:solidFill>
                   <a:srgbClr val="151008"/>
                 </a:solidFill>
-                <a:hlinkClick r:id="rId2" invalidUrl="" action="" tgtFrame="" tooltip="" history="1" highlightClick="0" endSnd="0">
-                  <a:extLst>
-                    <a:ext uri="{A12FA001-AC4F-418D-AE19-62706E023703}">
-                      <ahyp:hlinkClr xmlns:ahyp="http://schemas.microsoft.com/office/drawing/2018/hyperlinkcolor" val="tx"/>
-                    </a:ext>
-                  </a:extLst>
-                </a:hlinkClick>
+                <a:hlinkClick r:id="rId5"/>
               </a:rPr>
               <a:t>Create GPTs</a:t>
             </a:r>
@@ -24014,6 +24780,10 @@
             <a:prstDash val="solid"/>
           </a:ln>
         </p:spPr>
+        <p:txBody>
+          <a:bodyPr/>
+          <a:p/>
+        </p:txBody>
       </p:sp>
       <p:sp>
         <p:nvSpPr>
@@ -24039,6 +24809,10 @@
             <a:prstDash val="solid"/>
           </a:ln>
         </p:spPr>
+        <p:txBody>
+          <a:bodyPr/>
+          <a:p/>
+        </p:txBody>
       </p:sp>
       <p:sp>
         <p:nvSpPr>
@@ -24064,6 +24838,10 @@
             <a:prstDash val="solid"/>
           </a:ln>
         </p:spPr>
+        <p:txBody>
+          <a:bodyPr/>
+          <a:p/>
+        </p:txBody>
       </p:sp>
       <p:sp>
         <p:nvSpPr>
@@ -24089,6 +24867,10 @@
             <a:prstDash val="solid"/>
           </a:ln>
         </p:spPr>
+        <p:txBody>
+          <a:bodyPr/>
+          <a:p/>
+        </p:txBody>
       </p:sp>
       <p:sp>
         <p:nvSpPr>
@@ -24298,6 +25080,10 @@
             <a:prstDash val="solid"/>
           </a:ln>
         </p:spPr>
+        <p:txBody>
+          <a:bodyPr/>
+          <a:p/>
+        </p:txBody>
       </p:sp>
       <p:sp>
         <p:nvSpPr>
@@ -24401,6 +25187,10 @@
             <a:prstDash val="solid"/>
           </a:ln>
         </p:spPr>
+        <p:txBody>
+          <a:bodyPr/>
+          <a:p/>
+        </p:txBody>
       </p:sp>
       <p:sp>
         <p:nvSpPr>
@@ -24504,6 +25294,10 @@
             <a:prstDash val="solid"/>
           </a:ln>
         </p:spPr>
+        <p:txBody>
+          <a:bodyPr/>
+          <a:p/>
+        </p:txBody>
       </p:sp>
       <p:sp>
         <p:nvSpPr>
@@ -24688,6 +25482,10 @@
             <a:prstDash val="solid"/>
           </a:ln>
         </p:spPr>
+        <p:txBody>
+          <a:bodyPr/>
+          <a:p/>
+        </p:txBody>
       </p:sp>
       <p:sp>
         <p:nvSpPr>
@@ -24713,6 +25511,10 @@
             <a:prstDash val="solid"/>
           </a:ln>
         </p:spPr>
+        <p:txBody>
+          <a:bodyPr/>
+          <a:p/>
+        </p:txBody>
       </p:sp>
       <p:sp>
         <p:nvSpPr>
@@ -24738,6 +25540,10 @@
             <a:prstDash val="solid"/>
           </a:ln>
         </p:spPr>
+        <p:txBody>
+          <a:bodyPr/>
+          <a:p/>
+        </p:txBody>
       </p:sp>
       <p:sp>
         <p:nvSpPr>
@@ -24763,6 +25569,10 @@
             <a:prstDash val="solid"/>
           </a:ln>
         </p:spPr>
+        <p:txBody>
+          <a:bodyPr/>
+          <a:p/>
+        </p:txBody>
       </p:sp>
       <p:sp>
         <p:nvSpPr>
@@ -24934,6 +25744,10 @@
             <a:prstDash val="solid"/>
           </a:ln>
         </p:spPr>
+        <p:txBody>
+          <a:bodyPr/>
+          <a:p/>
+        </p:txBody>
       </p:sp>
       <p:sp>
         <p:nvSpPr>
@@ -25037,6 +25851,10 @@
             <a:prstDash val="solid"/>
           </a:ln>
         </p:spPr>
+        <p:txBody>
+          <a:bodyPr/>
+          <a:p/>
+        </p:txBody>
       </p:sp>
       <p:sp>
         <p:nvSpPr>
@@ -25140,6 +25958,10 @@
             <a:prstDash val="solid"/>
           </a:ln>
         </p:spPr>
+        <p:txBody>
+          <a:bodyPr/>
+          <a:p/>
+        </p:txBody>
       </p:sp>
       <p:sp>
         <p:nvSpPr>
@@ -25243,6 +26065,10 @@
             <a:prstDash val="solid"/>
           </a:ln>
         </p:spPr>
+        <p:txBody>
+          <a:bodyPr/>
+          <a:p/>
+        </p:txBody>
       </p:sp>
       <p:sp>
         <p:nvSpPr>
@@ -25346,6 +26172,10 @@
             <a:prstDash val="solid"/>
           </a:ln>
         </p:spPr>
+        <p:txBody>
+          <a:bodyPr/>
+          <a:p/>
+        </p:txBody>
       </p:sp>
       <p:sp>
         <p:nvSpPr>
@@ -25449,6 +26279,10 @@
             <a:prstDash val="solid"/>
           </a:ln>
         </p:spPr>
+        <p:txBody>
+          <a:bodyPr/>
+          <a:p/>
+        </p:txBody>
       </p:sp>
       <p:sp>
         <p:nvSpPr>
@@ -25582,6 +26416,10 @@
             <a:prstDash val="solid"/>
           </a:ln>
         </p:spPr>
+        <p:txBody>
+          <a:bodyPr/>
+          <a:p/>
+        </p:txBody>
       </p:sp>
       <p:sp>
         <p:nvSpPr>
@@ -25607,6 +26445,10 @@
             <a:prstDash val="solid"/>
           </a:ln>
         </p:spPr>
+        <p:txBody>
+          <a:bodyPr/>
+          <a:p/>
+        </p:txBody>
       </p:sp>
       <p:sp>
         <p:nvSpPr>
@@ -25632,6 +26474,10 @@
             <a:prstDash val="solid"/>
           </a:ln>
         </p:spPr>
+        <p:txBody>
+          <a:bodyPr/>
+          <a:p/>
+        </p:txBody>
       </p:sp>
       <p:sp>
         <p:nvSpPr>
@@ -25657,6 +26503,10 @@
             <a:prstDash val="solid"/>
           </a:ln>
         </p:spPr>
+        <p:txBody>
+          <a:bodyPr/>
+          <a:p/>
+        </p:txBody>
       </p:sp>
       <p:sp>
         <p:nvSpPr>
@@ -25868,6 +26718,10 @@
             <a:prstDash val="solid"/>
           </a:ln>
         </p:spPr>
+        <p:txBody>
+          <a:bodyPr/>
+          <a:p/>
+        </p:txBody>
       </p:sp>
       <p:sp>
         <p:nvSpPr>
@@ -25971,6 +26825,10 @@
             <a:prstDash val="solid"/>
           </a:ln>
         </p:spPr>
+        <p:txBody>
+          <a:bodyPr/>
+          <a:p/>
+        </p:txBody>
       </p:sp>
       <p:sp>
         <p:nvSpPr>
@@ -26074,6 +26932,10 @@
             <a:prstDash val="solid"/>
           </a:ln>
         </p:spPr>
+        <p:txBody>
+          <a:bodyPr/>
+          <a:p/>
+        </p:txBody>
       </p:sp>
       <p:sp>
         <p:nvSpPr>
@@ -26207,6 +27069,10 @@
             <a:prstDash val="solid"/>
           </a:ln>
         </p:spPr>
+        <p:txBody>
+          <a:bodyPr/>
+          <a:p/>
+        </p:txBody>
       </p:sp>
       <p:sp>
         <p:nvSpPr>
@@ -26232,6 +27098,10 @@
             <a:prstDash val="solid"/>
           </a:ln>
         </p:spPr>
+        <p:txBody>
+          <a:bodyPr/>
+          <a:p/>
+        </p:txBody>
       </p:sp>
       <p:sp>
         <p:nvSpPr>
@@ -26257,6 +27127,10 @@
             <a:prstDash val="solid"/>
           </a:ln>
         </p:spPr>
+        <p:txBody>
+          <a:bodyPr/>
+          <a:p/>
+        </p:txBody>
       </p:sp>
       <p:sp>
         <p:nvSpPr>
@@ -26282,6 +27156,10 @@
             <a:prstDash val="solid"/>
           </a:ln>
         </p:spPr>
+        <p:txBody>
+          <a:bodyPr/>
+          <a:p/>
+        </p:txBody>
       </p:sp>
       <p:sp>
         <p:nvSpPr>
@@ -26493,6 +27371,10 @@
             <a:prstDash val="solid"/>
           </a:ln>
         </p:spPr>
+        <p:txBody>
+          <a:bodyPr/>
+          <a:p/>
+        </p:txBody>
       </p:sp>
       <p:sp>
         <p:nvSpPr>
@@ -26596,6 +27478,10 @@
             <a:prstDash val="solid"/>
           </a:ln>
         </p:spPr>
+        <p:txBody>
+          <a:bodyPr/>
+          <a:p/>
+        </p:txBody>
       </p:sp>
       <p:sp>
         <p:nvSpPr>
@@ -26699,6 +27585,10 @@
             <a:prstDash val="solid"/>
           </a:ln>
         </p:spPr>
+        <p:txBody>
+          <a:bodyPr/>
+          <a:p/>
+        </p:txBody>
       </p:sp>
       <p:sp>
         <p:nvSpPr>
@@ -26832,6 +27722,10 @@
             <a:prstDash val="solid"/>
           </a:ln>
         </p:spPr>
+        <p:txBody>
+          <a:bodyPr/>
+          <a:p/>
+        </p:txBody>
       </p:sp>
       <p:sp>
         <p:nvSpPr>
@@ -26857,6 +27751,10 @@
             <a:prstDash val="solid"/>
           </a:ln>
         </p:spPr>
+        <p:txBody>
+          <a:bodyPr/>
+          <a:p/>
+        </p:txBody>
       </p:sp>
       <p:sp>
         <p:nvSpPr>
@@ -26882,6 +27780,10 @@
             <a:prstDash val="solid"/>
           </a:ln>
         </p:spPr>
+        <p:txBody>
+          <a:bodyPr/>
+          <a:p/>
+        </p:txBody>
       </p:sp>
       <p:sp>
         <p:nvSpPr>
@@ -26907,6 +27809,10 @@
             <a:prstDash val="solid"/>
           </a:ln>
         </p:spPr>
+        <p:txBody>
+          <a:bodyPr/>
+          <a:p/>
+        </p:txBody>
       </p:sp>
       <p:sp>
         <p:nvSpPr>
@@ -27118,6 +28024,10 @@
             <a:prstDash val="solid"/>
           </a:ln>
         </p:spPr>
+        <p:txBody>
+          <a:bodyPr/>
+          <a:p/>
+        </p:txBody>
       </p:sp>
       <p:sp>
         <p:nvSpPr>
@@ -27221,6 +28131,10 @@
             <a:prstDash val="solid"/>
           </a:ln>
         </p:spPr>
+        <p:txBody>
+          <a:bodyPr/>
+          <a:p/>
+        </p:txBody>
       </p:sp>
       <p:sp>
         <p:nvSpPr>
@@ -27324,6 +28238,10 @@
             <a:prstDash val="solid"/>
           </a:ln>
         </p:spPr>
+        <p:txBody>
+          <a:bodyPr/>
+          <a:p/>
+        </p:txBody>
       </p:sp>
       <p:sp>
         <p:nvSpPr>
@@ -27457,6 +28375,10 @@
             <a:prstDash val="solid"/>
           </a:ln>
         </p:spPr>
+        <p:txBody>
+          <a:bodyPr/>
+          <a:p/>
+        </p:txBody>
       </p:sp>
       <p:sp>
         <p:nvSpPr>
@@ -27482,6 +28404,10 @@
             <a:prstDash val="solid"/>
           </a:ln>
         </p:spPr>
+        <p:txBody>
+          <a:bodyPr/>
+          <a:p/>
+        </p:txBody>
       </p:sp>
       <p:sp>
         <p:nvSpPr>
@@ -27507,6 +28433,10 @@
             <a:prstDash val="solid"/>
           </a:ln>
         </p:spPr>
+        <p:txBody>
+          <a:bodyPr/>
+          <a:p/>
+        </p:txBody>
       </p:sp>
       <p:sp>
         <p:nvSpPr>
@@ -27532,6 +28462,10 @@
             <a:prstDash val="solid"/>
           </a:ln>
         </p:spPr>
+        <p:txBody>
+          <a:bodyPr/>
+          <a:p/>
+        </p:txBody>
       </p:sp>
       <p:sp>
         <p:nvSpPr>
@@ -27665,6 +28599,10 @@
             <a:prstDash val="solid"/>
           </a:ln>
         </p:spPr>
+        <p:txBody>
+          <a:bodyPr/>
+          <a:p/>
+        </p:txBody>
       </p:sp>
       <p:sp>
         <p:nvSpPr>
@@ -27798,6 +28736,10 @@
             <a:prstDash val="solid"/>
           </a:ln>
         </p:spPr>
+        <p:txBody>
+          <a:bodyPr/>
+          <a:p/>
+        </p:txBody>
       </p:sp>
       <p:sp>
         <p:nvSpPr>
@@ -27823,6 +28765,10 @@
             <a:prstDash val="solid"/>
           </a:ln>
         </p:spPr>
+        <p:txBody>
+          <a:bodyPr/>
+          <a:p/>
+        </p:txBody>
       </p:sp>
       <p:sp>
         <p:nvSpPr>
@@ -27848,6 +28794,10 @@
             <a:prstDash val="solid"/>
           </a:ln>
         </p:spPr>
+        <p:txBody>
+          <a:bodyPr/>
+          <a:p/>
+        </p:txBody>
       </p:sp>
       <p:sp>
         <p:nvSpPr>
@@ -27873,6 +28823,10 @@
             <a:prstDash val="solid"/>
           </a:ln>
         </p:spPr>
+        <p:txBody>
+          <a:bodyPr/>
+          <a:p/>
+        </p:txBody>
       </p:sp>
       <p:sp>
         <p:nvSpPr>
@@ -28084,6 +29038,10 @@
             <a:prstDash val="solid"/>
           </a:ln>
         </p:spPr>
+        <p:txBody>
+          <a:bodyPr/>
+          <a:p/>
+        </p:txBody>
       </p:sp>
       <p:sp>
         <p:nvSpPr>
@@ -28187,6 +29145,10 @@
             <a:prstDash val="solid"/>
           </a:ln>
         </p:spPr>
+        <p:txBody>
+          <a:bodyPr/>
+          <a:p/>
+        </p:txBody>
       </p:sp>
       <p:sp>
         <p:nvSpPr>
@@ -28290,6 +29252,10 @@
             <a:prstDash val="solid"/>
           </a:ln>
         </p:spPr>
+        <p:txBody>
+          <a:bodyPr/>
+          <a:p/>
+        </p:txBody>
       </p:sp>
       <p:sp>
         <p:nvSpPr>
@@ -28393,6 +29359,10 @@
             <a:prstDash val="solid"/>
           </a:ln>
         </p:spPr>
+        <p:txBody>
+          <a:bodyPr/>
+          <a:p/>
+        </p:txBody>
       </p:sp>
       <p:sp>
         <p:nvSpPr>
@@ -28496,6 +29466,10 @@
             <a:prstDash val="solid"/>
           </a:ln>
         </p:spPr>
+        <p:txBody>
+          <a:bodyPr/>
+          <a:p/>
+        </p:txBody>
       </p:sp>
       <p:sp>
         <p:nvSpPr>
@@ -28599,6 +29573,10 @@
             <a:prstDash val="solid"/>
           </a:ln>
         </p:spPr>
+        <p:txBody>
+          <a:bodyPr/>
+          <a:p/>
+        </p:txBody>
       </p:sp>
       <p:sp>
         <p:nvSpPr>
@@ -28732,6 +29710,10 @@
             <a:prstDash val="solid"/>
           </a:ln>
         </p:spPr>
+        <p:txBody>
+          <a:bodyPr/>
+          <a:p/>
+        </p:txBody>
       </p:sp>
       <p:sp>
         <p:nvSpPr>
@@ -28757,6 +29739,10 @@
             <a:prstDash val="solid"/>
           </a:ln>
         </p:spPr>
+        <p:txBody>
+          <a:bodyPr/>
+          <a:p/>
+        </p:txBody>
       </p:sp>
       <p:sp>
         <p:nvSpPr>
@@ -28782,6 +29768,10 @@
             <a:prstDash val="solid"/>
           </a:ln>
         </p:spPr>
+        <p:txBody>
+          <a:bodyPr/>
+          <a:p/>
+        </p:txBody>
       </p:sp>
       <p:sp>
         <p:nvSpPr>
@@ -28807,6 +29797,10 @@
             <a:prstDash val="solid"/>
           </a:ln>
         </p:spPr>
+        <p:txBody>
+          <a:bodyPr/>
+          <a:p/>
+        </p:txBody>
       </p:sp>
       <p:sp>
         <p:nvSpPr>
@@ -28940,6 +29934,10 @@
             <a:prstDash val="solid"/>
           </a:ln>
         </p:spPr>
+        <p:txBody>
+          <a:bodyPr/>
+          <a:p/>
+        </p:txBody>
       </p:sp>
       <p:sp>
         <p:nvSpPr>
@@ -29073,6 +30071,10 @@
             <a:prstDash val="solid"/>
           </a:ln>
         </p:spPr>
+        <p:txBody>
+          <a:bodyPr/>
+          <a:p/>
+        </p:txBody>
       </p:sp>
       <p:sp>
         <p:nvSpPr>
@@ -29098,6 +30100,10 @@
             <a:prstDash val="solid"/>
           </a:ln>
         </p:spPr>
+        <p:txBody>
+          <a:bodyPr/>
+          <a:p/>
+        </p:txBody>
       </p:sp>
       <p:sp>
         <p:nvSpPr>
@@ -29123,6 +30129,10 @@
             <a:prstDash val="solid"/>
           </a:ln>
         </p:spPr>
+        <p:txBody>
+          <a:bodyPr/>
+          <a:p/>
+        </p:txBody>
       </p:sp>
       <p:sp>
         <p:nvSpPr>
@@ -29148,6 +30158,10 @@
             <a:prstDash val="solid"/>
           </a:ln>
         </p:spPr>
+        <p:txBody>
+          <a:bodyPr/>
+          <a:p/>
+        </p:txBody>
       </p:sp>
       <p:sp>
         <p:nvSpPr>
@@ -29359,6 +30373,10 @@
             <a:prstDash val="solid"/>
           </a:ln>
         </p:spPr>
+        <p:txBody>
+          <a:bodyPr/>
+          <a:p/>
+        </p:txBody>
       </p:sp>
       <p:sp>
         <p:nvSpPr>
@@ -29462,6 +30480,10 @@
             <a:prstDash val="solid"/>
           </a:ln>
         </p:spPr>
+        <p:txBody>
+          <a:bodyPr/>
+          <a:p/>
+        </p:txBody>
       </p:sp>
       <p:sp>
         <p:nvSpPr>
@@ -29565,6 +30587,10 @@
             <a:prstDash val="solid"/>
           </a:ln>
         </p:spPr>
+        <p:txBody>
+          <a:bodyPr/>
+          <a:p/>
+        </p:txBody>
       </p:sp>
       <p:sp>
         <p:nvSpPr>
@@ -29698,6 +30724,10 @@
             <a:prstDash val="solid"/>
           </a:ln>
         </p:spPr>
+        <p:txBody>
+          <a:bodyPr/>
+          <a:p/>
+        </p:txBody>
       </p:sp>
       <p:sp>
         <p:nvSpPr>
@@ -29723,6 +30753,10 @@
             <a:prstDash val="solid"/>
           </a:ln>
         </p:spPr>
+        <p:txBody>
+          <a:bodyPr/>
+          <a:p/>
+        </p:txBody>
       </p:sp>
       <p:sp>
         <p:nvSpPr>
@@ -29748,6 +30782,10 @@
             <a:prstDash val="solid"/>
           </a:ln>
         </p:spPr>
+        <p:txBody>
+          <a:bodyPr/>
+          <a:p/>
+        </p:txBody>
       </p:sp>
       <p:sp>
         <p:nvSpPr>
@@ -29773,6 +30811,10 @@
             <a:prstDash val="solid"/>
           </a:ln>
         </p:spPr>
+        <p:txBody>
+          <a:bodyPr/>
+          <a:p/>
+        </p:txBody>
       </p:sp>
       <p:sp>
         <p:nvSpPr>
@@ -29984,6 +31026,10 @@
             <a:prstDash val="solid"/>
           </a:ln>
         </p:spPr>
+        <p:txBody>
+          <a:bodyPr/>
+          <a:p/>
+        </p:txBody>
       </p:sp>
       <p:sp>
         <p:nvSpPr>
@@ -30087,6 +31133,10 @@
             <a:prstDash val="solid"/>
           </a:ln>
         </p:spPr>
+        <p:txBody>
+          <a:bodyPr/>
+          <a:p/>
+        </p:txBody>
       </p:sp>
       <p:sp>
         <p:nvSpPr>
@@ -30190,6 +31240,10 @@
             <a:prstDash val="solid"/>
           </a:ln>
         </p:spPr>
+        <p:txBody>
+          <a:bodyPr/>
+          <a:p/>
+        </p:txBody>
       </p:sp>
       <p:sp>
         <p:nvSpPr>
@@ -30323,6 +31377,10 @@
             <a:prstDash val="solid"/>
           </a:ln>
         </p:spPr>
+        <p:txBody>
+          <a:bodyPr/>
+          <a:p/>
+        </p:txBody>
       </p:sp>
       <p:sp>
         <p:nvSpPr>
@@ -30348,6 +31406,10 @@
             <a:prstDash val="solid"/>
           </a:ln>
         </p:spPr>
+        <p:txBody>
+          <a:bodyPr/>
+          <a:p/>
+        </p:txBody>
       </p:sp>
       <p:sp>
         <p:nvSpPr>
@@ -30373,6 +31435,10 @@
             <a:prstDash val="solid"/>
           </a:ln>
         </p:spPr>
+        <p:txBody>
+          <a:bodyPr/>
+          <a:p/>
+        </p:txBody>
       </p:sp>
       <p:sp>
         <p:nvSpPr>
@@ -30398,6 +31464,10 @@
             <a:prstDash val="solid"/>
           </a:ln>
         </p:spPr>
+        <p:txBody>
+          <a:bodyPr/>
+          <a:p/>
+        </p:txBody>
       </p:sp>
       <p:sp>
         <p:nvSpPr>
@@ -30609,6 +31679,10 @@
             <a:prstDash val="solid"/>
           </a:ln>
         </p:spPr>
+        <p:txBody>
+          <a:bodyPr/>
+          <a:p/>
+        </p:txBody>
       </p:sp>
       <p:sp>
         <p:nvSpPr>
@@ -30712,6 +31786,10 @@
             <a:prstDash val="solid"/>
           </a:ln>
         </p:spPr>
+        <p:txBody>
+          <a:bodyPr/>
+          <a:p/>
+        </p:txBody>
       </p:sp>
       <p:sp>
         <p:nvSpPr>
@@ -30815,6 +31893,10 @@
             <a:prstDash val="solid"/>
           </a:ln>
         </p:spPr>
+        <p:txBody>
+          <a:bodyPr/>
+          <a:p/>
+        </p:txBody>
       </p:sp>
       <p:sp>
         <p:nvSpPr>
@@ -30948,6 +32030,10 @@
             <a:prstDash val="solid"/>
           </a:ln>
         </p:spPr>
+        <p:txBody>
+          <a:bodyPr/>
+          <a:p/>
+        </p:txBody>
       </p:sp>
       <p:sp>
         <p:nvSpPr>
@@ -30973,6 +32059,10 @@
             <a:prstDash val="solid"/>
           </a:ln>
         </p:spPr>
+        <p:txBody>
+          <a:bodyPr/>
+          <a:p/>
+        </p:txBody>
       </p:sp>
       <p:sp>
         <p:nvSpPr>
@@ -30998,6 +32088,10 @@
             <a:prstDash val="solid"/>
           </a:ln>
         </p:spPr>
+        <p:txBody>
+          <a:bodyPr/>
+          <a:p/>
+        </p:txBody>
       </p:sp>
       <p:sp>
         <p:nvSpPr>
@@ -31023,6 +32117,10 @@
             <a:prstDash val="solid"/>
           </a:ln>
         </p:spPr>
+        <p:txBody>
+          <a:bodyPr/>
+          <a:p/>
+        </p:txBody>
       </p:sp>
       <p:sp>
         <p:nvSpPr>
@@ -31234,6 +32332,10 @@
             <a:prstDash val="solid"/>
           </a:ln>
         </p:spPr>
+        <p:txBody>
+          <a:bodyPr/>
+          <a:p/>
+        </p:txBody>
       </p:sp>
       <p:sp>
         <p:nvSpPr>
@@ -31337,6 +32439,10 @@
             <a:prstDash val="solid"/>
           </a:ln>
         </p:spPr>
+        <p:txBody>
+          <a:bodyPr/>
+          <a:p/>
+        </p:txBody>
       </p:sp>
       <p:sp>
         <p:nvSpPr>
@@ -31440,6 +32546,10 @@
             <a:prstDash val="solid"/>
           </a:ln>
         </p:spPr>
+        <p:txBody>
+          <a:bodyPr/>
+          <a:p/>
+        </p:txBody>
       </p:sp>
       <p:sp>
         <p:nvSpPr>
@@ -31543,6 +32653,10 @@
             <a:prstDash val="solid"/>
           </a:ln>
         </p:spPr>
+        <p:txBody>
+          <a:bodyPr/>
+          <a:p/>
+        </p:txBody>
       </p:sp>
       <p:sp>
         <p:nvSpPr>
@@ -31646,6 +32760,10 @@
             <a:prstDash val="solid"/>
           </a:ln>
         </p:spPr>
+        <p:txBody>
+          <a:bodyPr/>
+          <a:p/>
+        </p:txBody>
       </p:sp>
       <p:sp>
         <p:nvSpPr>
@@ -31749,6 +32867,10 @@
             <a:prstDash val="solid"/>
           </a:ln>
         </p:spPr>
+        <p:txBody>
+          <a:bodyPr/>
+          <a:p/>
+        </p:txBody>
       </p:sp>
       <p:sp>
         <p:nvSpPr>
@@ -31882,6 +33004,10 @@
             <a:prstDash val="solid"/>
           </a:ln>
         </p:spPr>
+        <p:txBody>
+          <a:bodyPr/>
+          <a:p/>
+        </p:txBody>
       </p:sp>
       <p:sp>
         <p:nvSpPr>
@@ -31907,6 +33033,10 @@
             <a:prstDash val="solid"/>
           </a:ln>
         </p:spPr>
+        <p:txBody>
+          <a:bodyPr/>
+          <a:p/>
+        </p:txBody>
       </p:sp>
       <p:sp>
         <p:nvSpPr>
@@ -31932,6 +33062,10 @@
             <a:prstDash val="solid"/>
           </a:ln>
         </p:spPr>
+        <p:txBody>
+          <a:bodyPr/>
+          <a:p/>
+        </p:txBody>
       </p:sp>
       <p:sp>
         <p:nvSpPr>
@@ -31957,6 +33091,10 @@
             <a:prstDash val="solid"/>
           </a:ln>
         </p:spPr>
+        <p:txBody>
+          <a:bodyPr/>
+          <a:p/>
+        </p:txBody>
       </p:sp>
       <p:sp>
         <p:nvSpPr>
@@ -32090,6 +33228,10 @@
             <a:prstDash val="solid"/>
           </a:ln>
         </p:spPr>
+        <p:txBody>
+          <a:bodyPr/>
+          <a:p/>
+        </p:txBody>
       </p:sp>
       <p:sp>
         <p:nvSpPr>
@@ -32223,6 +33365,10 @@
             <a:prstDash val="solid"/>
           </a:ln>
         </p:spPr>
+        <p:txBody>
+          <a:bodyPr/>
+          <a:p/>
+        </p:txBody>
       </p:sp>
       <p:sp>
         <p:nvSpPr>
@@ -32248,6 +33394,10 @@
             <a:prstDash val="solid"/>
           </a:ln>
         </p:spPr>
+        <p:txBody>
+          <a:bodyPr/>
+          <a:p/>
+        </p:txBody>
       </p:sp>
       <p:sp>
         <p:nvSpPr>
@@ -32273,6 +33423,10 @@
             <a:prstDash val="solid"/>
           </a:ln>
         </p:spPr>
+        <p:txBody>
+          <a:bodyPr/>
+          <a:p/>
+        </p:txBody>
       </p:sp>
       <p:sp>
         <p:nvSpPr>
@@ -32298,6 +33452,10 @@
             <a:prstDash val="solid"/>
           </a:ln>
         </p:spPr>
+        <p:txBody>
+          <a:bodyPr/>
+          <a:p/>
+        </p:txBody>
       </p:sp>
       <p:sp>
         <p:nvSpPr>
@@ -32509,6 +33667,10 @@
             <a:prstDash val="solid"/>
           </a:ln>
         </p:spPr>
+        <p:txBody>
+          <a:bodyPr/>
+          <a:p/>
+        </p:txBody>
       </p:sp>
       <p:sp>
         <p:nvSpPr>
@@ -32612,6 +33774,10 @@
             <a:prstDash val="solid"/>
           </a:ln>
         </p:spPr>
+        <p:txBody>
+          <a:bodyPr/>
+          <a:p/>
+        </p:txBody>
       </p:sp>
       <p:sp>
         <p:nvSpPr>
@@ -32715,6 +33881,10 @@
             <a:prstDash val="solid"/>
           </a:ln>
         </p:spPr>
+        <p:txBody>
+          <a:bodyPr/>
+          <a:p/>
+        </p:txBody>
       </p:sp>
       <p:sp>
         <p:nvSpPr>
@@ -32818,6 +33988,10 @@
             <a:prstDash val="solid"/>
           </a:ln>
         </p:spPr>
+        <p:txBody>
+          <a:bodyPr/>
+          <a:p/>
+        </p:txBody>
       </p:sp>
       <p:sp>
         <p:nvSpPr>
@@ -32951,6 +34125,10 @@
             <a:prstDash val="solid"/>
           </a:ln>
         </p:spPr>
+        <p:txBody>
+          <a:bodyPr/>
+          <a:p/>
+        </p:txBody>
       </p:sp>
       <p:sp>
         <p:nvSpPr>
@@ -32976,6 +34154,10 @@
             <a:prstDash val="solid"/>
           </a:ln>
         </p:spPr>
+        <p:txBody>
+          <a:bodyPr/>
+          <a:p/>
+        </p:txBody>
       </p:sp>
       <p:sp>
         <p:nvSpPr>
@@ -33001,6 +34183,10 @@
             <a:prstDash val="solid"/>
           </a:ln>
         </p:spPr>
+        <p:txBody>
+          <a:bodyPr/>
+          <a:p/>
+        </p:txBody>
       </p:sp>
       <p:sp>
         <p:nvSpPr>
@@ -33026,6 +34212,10 @@
             <a:prstDash val="solid"/>
           </a:ln>
         </p:spPr>
+        <p:txBody>
+          <a:bodyPr/>
+          <a:p/>
+        </p:txBody>
       </p:sp>
       <p:sp>
         <p:nvSpPr>
@@ -33921,7 +35111,7 @@
       <p:sp>
         <p:nvSpPr>
           <p:cNvPr id="28" name="Text 26">
-            <a:hlinkClick r:id="rId10" tooltip=""/>
+            <a:hlinkClick r:id="rId13"/>
           </p:cNvPr>
           <p:cNvSpPr/>
           <p:nvPr/>
@@ -33949,13 +35139,7 @@
                 <a:solidFill>
                   <a:srgbClr val="FFF7E8"/>
                 </a:solidFill>
-                <a:hlinkClick r:id="rId10" invalidUrl="" action="" tgtFrame="" tooltip="" history="1" highlightClick="0" endSnd="0">
-                  <a:extLst>
-                    <a:ext uri="{A12FA001-AC4F-418D-AE19-62706E023703}">
-                      <ahyp:hlinkClr xmlns:ahyp="http://schemas.microsoft.com/office/drawing/2018/hyperlinkcolor" val="tx"/>
-                    </a:ext>
-                  </a:extLst>
-                </a:hlinkClick>
+                <a:hlinkClick r:id="rId13"/>
               </a:rPr>
               <a:t>OpenAI creating/editing GPTs</a:t>
             </a:r>
@@ -33995,7 +35179,7 @@
                   <a:srgbClr val="CBBFA8"/>
                 </a:solidFill>
               </a:rPr>
-              <a:t>help.openai.com/en/articles/20001049-apps-in-custom-gpts-beta</a:t>
+              <a:t>help.openai.com/en/articles/8554397-creating-a-custom-gpt</a:t>
             </a:r>
             <a:endParaRPr lang="en-US" sz="740" dirty="0"/>
           </a:p>
@@ -34057,6 +35241,10 @@
             <a:prstDash val="solid"/>
           </a:ln>
         </p:spPr>
+        <p:txBody>
+          <a:bodyPr/>
+          <a:p/>
+        </p:txBody>
       </p:sp>
       <p:sp>
         <p:nvSpPr>
@@ -34082,6 +35270,10 @@
             <a:prstDash val="solid"/>
           </a:ln>
         </p:spPr>
+        <p:txBody>
+          <a:bodyPr/>
+          <a:p/>
+        </p:txBody>
       </p:sp>
       <p:sp>
         <p:nvSpPr>
@@ -34107,6 +35299,10 @@
             <a:prstDash val="solid"/>
           </a:ln>
         </p:spPr>
+        <p:txBody>
+          <a:bodyPr/>
+          <a:p/>
+        </p:txBody>
       </p:sp>
       <p:sp>
         <p:nvSpPr>
@@ -34132,6 +35328,10 @@
             <a:prstDash val="solid"/>
           </a:ln>
         </p:spPr>
+        <p:txBody>
+          <a:bodyPr/>
+          <a:p/>
+        </p:txBody>
       </p:sp>
       <p:sp>
         <p:nvSpPr>
@@ -34369,6 +35569,10 @@
             <a:prstDash val="solid"/>
           </a:ln>
         </p:spPr>
+        <p:txBody>
+          <a:bodyPr/>
+          <a:p/>
+        </p:txBody>
       </p:sp>
       <p:sp>
         <p:nvSpPr>
@@ -34502,6 +35706,10 @@
             <a:prstDash val="solid"/>
           </a:ln>
         </p:spPr>
+        <p:txBody>
+          <a:bodyPr/>
+          <a:p/>
+        </p:txBody>
       </p:sp>
       <p:sp>
         <p:nvSpPr>
@@ -34527,6 +35735,10 @@
             <a:prstDash val="solid"/>
           </a:ln>
         </p:spPr>
+        <p:txBody>
+          <a:bodyPr/>
+          <a:p/>
+        </p:txBody>
       </p:sp>
       <p:sp>
         <p:nvSpPr>
@@ -34552,6 +35764,10 @@
             <a:prstDash val="solid"/>
           </a:ln>
         </p:spPr>
+        <p:txBody>
+          <a:bodyPr/>
+          <a:p/>
+        </p:txBody>
       </p:sp>
       <p:sp>
         <p:nvSpPr>
@@ -34577,6 +35793,10 @@
             <a:prstDash val="solid"/>
           </a:ln>
         </p:spPr>
+        <p:txBody>
+          <a:bodyPr/>
+          <a:p/>
+        </p:txBody>
       </p:sp>
       <p:sp>
         <p:nvSpPr>
@@ -34788,6 +36008,10 @@
             <a:prstDash val="solid"/>
           </a:ln>
         </p:spPr>
+        <p:txBody>
+          <a:bodyPr/>
+          <a:p/>
+        </p:txBody>
       </p:sp>
       <p:sp>
         <p:nvSpPr>
@@ -34927,6 +36151,10 @@
             <a:prstDash val="solid"/>
           </a:ln>
         </p:spPr>
+        <p:txBody>
+          <a:bodyPr/>
+          <a:p/>
+        </p:txBody>
       </p:sp>
       <p:sp>
         <p:nvSpPr>
@@ -35066,6 +36294,10 @@
             <a:prstDash val="solid"/>
           </a:ln>
         </p:spPr>
+        <p:txBody>
+          <a:bodyPr/>
+          <a:p/>
+        </p:txBody>
       </p:sp>
       <p:sp>
         <p:nvSpPr>
@@ -35235,6 +36467,10 @@
             <a:prstDash val="solid"/>
           </a:ln>
         </p:spPr>
+        <p:txBody>
+          <a:bodyPr/>
+          <a:p/>
+        </p:txBody>
       </p:sp>
       <p:sp>
         <p:nvSpPr>
@@ -35260,6 +36496,10 @@
             <a:prstDash val="solid"/>
           </a:ln>
         </p:spPr>
+        <p:txBody>
+          <a:bodyPr/>
+          <a:p/>
+        </p:txBody>
       </p:sp>
       <p:sp>
         <p:nvSpPr>
@@ -35285,6 +36525,10 @@
             <a:prstDash val="solid"/>
           </a:ln>
         </p:spPr>
+        <p:txBody>
+          <a:bodyPr/>
+          <a:p/>
+        </p:txBody>
       </p:sp>
       <p:sp>
         <p:nvSpPr>
@@ -35310,6 +36554,10 @@
             <a:prstDash val="solid"/>
           </a:ln>
         </p:spPr>
+        <p:txBody>
+          <a:bodyPr/>
+          <a:p/>
+        </p:txBody>
       </p:sp>
       <p:sp>
         <p:nvSpPr>
@@ -35521,6 +36769,10 @@
             <a:prstDash val="solid"/>
           </a:ln>
         </p:spPr>
+        <p:txBody>
+          <a:bodyPr/>
+          <a:p/>
+        </p:txBody>
       </p:sp>
       <p:sp>
         <p:nvSpPr>
@@ -35624,6 +36876,10 @@
             <a:prstDash val="solid"/>
           </a:ln>
         </p:spPr>
+        <p:txBody>
+          <a:bodyPr/>
+          <a:p/>
+        </p:txBody>
       </p:sp>
       <p:sp>
         <p:nvSpPr>
@@ -35727,6 +36983,10 @@
             <a:prstDash val="solid"/>
           </a:ln>
         </p:spPr>
+        <p:txBody>
+          <a:bodyPr/>
+          <a:p/>
+        </p:txBody>
       </p:sp>
       <p:sp>
         <p:nvSpPr>
@@ -35860,6 +37120,10 @@
             <a:prstDash val="solid"/>
           </a:ln>
         </p:spPr>
+        <p:txBody>
+          <a:bodyPr/>
+          <a:p/>
+        </p:txBody>
       </p:sp>
       <p:sp>
         <p:nvSpPr>
@@ -35885,6 +37149,10 @@
             <a:prstDash val="solid"/>
           </a:ln>
         </p:spPr>
+        <p:txBody>
+          <a:bodyPr/>
+          <a:p/>
+        </p:txBody>
       </p:sp>
       <p:sp>
         <p:nvSpPr>
@@ -35910,6 +37178,10 @@
             <a:prstDash val="solid"/>
           </a:ln>
         </p:spPr>
+        <p:txBody>
+          <a:bodyPr/>
+          <a:p/>
+        </p:txBody>
       </p:sp>
       <p:sp>
         <p:nvSpPr>
@@ -35935,6 +37207,10 @@
             <a:prstDash val="solid"/>
           </a:ln>
         </p:spPr>
+        <p:txBody>
+          <a:bodyPr/>
+          <a:p/>
+        </p:txBody>
       </p:sp>
       <p:sp>
         <p:nvSpPr>
@@ -36146,6 +37422,10 @@
             <a:prstDash val="solid"/>
           </a:ln>
         </p:spPr>
+        <p:txBody>
+          <a:bodyPr/>
+          <a:p/>
+        </p:txBody>
       </p:sp>
       <p:sp>
         <p:nvSpPr>
@@ -36249,6 +37529,10 @@
             <a:prstDash val="solid"/>
           </a:ln>
         </p:spPr>
+        <p:txBody>
+          <a:bodyPr/>
+          <a:p/>
+        </p:txBody>
       </p:sp>
       <p:sp>
         <p:nvSpPr>
@@ -36352,6 +37636,10 @@
             <a:prstDash val="solid"/>
           </a:ln>
         </p:spPr>
+        <p:txBody>
+          <a:bodyPr/>
+          <a:p/>
+        </p:txBody>
       </p:sp>
       <p:sp>
         <p:nvSpPr>
@@ -36485,6 +37773,10 @@
             <a:prstDash val="solid"/>
           </a:ln>
         </p:spPr>
+        <p:txBody>
+          <a:bodyPr/>
+          <a:p/>
+        </p:txBody>
       </p:sp>
       <p:sp>
         <p:nvSpPr>
@@ -36510,6 +37802,10 @@
             <a:prstDash val="solid"/>
           </a:ln>
         </p:spPr>
+        <p:txBody>
+          <a:bodyPr/>
+          <a:p/>
+        </p:txBody>
       </p:sp>
       <p:sp>
         <p:nvSpPr>
@@ -36535,6 +37831,10 @@
             <a:prstDash val="solid"/>
           </a:ln>
         </p:spPr>
+        <p:txBody>
+          <a:bodyPr/>
+          <a:p/>
+        </p:txBody>
       </p:sp>
       <p:sp>
         <p:nvSpPr>
@@ -36560,6 +37860,10 @@
             <a:prstDash val="solid"/>
           </a:ln>
         </p:spPr>
+        <p:txBody>
+          <a:bodyPr/>
+          <a:p/>
+        </p:txBody>
       </p:sp>
       <p:sp>
         <p:nvSpPr>
@@ -36693,6 +37997,10 @@
             <a:prstDash val="solid"/>
           </a:ln>
         </p:spPr>
+        <p:txBody>
+          <a:bodyPr/>
+          <a:p/>
+        </p:txBody>
       </p:sp>
       <p:sp>
         <p:nvSpPr>
@@ -36826,6 +38134,10 @@
             <a:prstDash val="solid"/>
           </a:ln>
         </p:spPr>
+        <p:txBody>
+          <a:bodyPr/>
+          <a:p/>
+        </p:txBody>
       </p:sp>
       <p:sp>
         <p:nvSpPr>
@@ -36851,6 +38163,10 @@
             <a:prstDash val="solid"/>
           </a:ln>
         </p:spPr>
+        <p:txBody>
+          <a:bodyPr/>
+          <a:p/>
+        </p:txBody>
       </p:sp>
       <p:sp>
         <p:nvSpPr>
@@ -36876,6 +38192,10 @@
             <a:prstDash val="solid"/>
           </a:ln>
         </p:spPr>
+        <p:txBody>
+          <a:bodyPr/>
+          <a:p/>
+        </p:txBody>
       </p:sp>
       <p:sp>
         <p:nvSpPr>
@@ -36901,6 +38221,10 @@
             <a:prstDash val="solid"/>
           </a:ln>
         </p:spPr>
+        <p:txBody>
+          <a:bodyPr/>
+          <a:p/>
+        </p:txBody>
       </p:sp>
       <p:sp>
         <p:nvSpPr>
@@ -37112,6 +38436,10 @@
             <a:prstDash val="solid"/>
           </a:ln>
         </p:spPr>
+        <p:txBody>
+          <a:bodyPr/>
+          <a:p/>
+        </p:txBody>
       </p:sp>
       <p:sp>
         <p:nvSpPr>
@@ -37215,6 +38543,10 @@
             <a:prstDash val="solid"/>
           </a:ln>
         </p:spPr>
+        <p:txBody>
+          <a:bodyPr/>
+          <a:p/>
+        </p:txBody>
       </p:sp>
       <p:sp>
         <p:nvSpPr>
@@ -37318,6 +38650,10 @@
             <a:prstDash val="solid"/>
           </a:ln>
         </p:spPr>
+        <p:txBody>
+          <a:bodyPr/>
+          <a:p/>
+        </p:txBody>
       </p:sp>
       <p:sp>
         <p:nvSpPr>
